--- a/outreach/pitch-decks/cliffco-lance-morgan-partnership.pptx
+++ b/outreach/pitch-decks/cliffco-lance-morgan-partnership.pptx
@@ -3279,7 +3279,7 @@
                 <a:ea typeface="Arial" pitchFamily="34" charset="-122"/>
                 <a:cs typeface="Arial" pitchFamily="34" charset="-120"/>
               </a:rPr>
-              <a:t>80+ loan officers nationwide</a:t>
+              <a:t>Real hands on every file</a:t>
             </a:r>
             <a:endParaRPr lang="en-US" sz="1300" dirty="0"/>
           </a:p>
@@ -3712,7 +3712,7 @@
                 <a:ea typeface="Montserrat" pitchFamily="34" charset="-122"/>
                 <a:cs typeface="Montserrat" pitchFamily="34" charset="-120"/>
               </a:rPr>
-              <a:t>THE PROSPECT</a:t>
+              <a:t>WHO YOU ARE</a:t>
             </a:r>
             <a:endParaRPr lang="en-US" sz="1400" dirty="0"/>
           </a:p>
@@ -5491,7 +5491,7 @@
                 <a:ea typeface="Arial" pitchFamily="34" charset="-122"/>
                 <a:cs typeface="Arial" pitchFamily="34" charset="-120"/>
               </a:rPr>
-              <a:t>Licensed as a mortgage banker in 35 states, with an 80+ loan officer team closing investor and second-home loans nationwide.</a:t>
+              <a:t>Licensed as a mortgage banker in 35 states, closing investor and second-home loans nationwide with real, licensed loan officers on every file.</a:t>
             </a:r>
             <a:endParaRPr lang="en-US" sz="1400" dirty="0"/>
           </a:p>

--- a/outreach/pitch-decks/cliffco-lance-morgan-partnership.pptx
+++ b/outreach/pitch-decks/cliffco-lance-morgan-partnership.pptx
@@ -2261,7 +2261,7 @@
                 <a:ea typeface="Arial" pitchFamily="34" charset="-122"/>
                 <a:cs typeface="Arial" pitchFamily="34" charset="-120"/>
               </a:rPr>
-              <a:t>Structure the partnership — webinar co-presentation, preferred-lender placement, or affiliate terms</a:t>
+              <a:t>Structure the partnership — we'll walk through compensation and structure together</a:t>
             </a:r>
             <a:endParaRPr lang="en-US" sz="1450" dirty="0"/>
           </a:p>
@@ -6015,7 +6015,7 @@
                 <a:ea typeface="Montserrat" pitchFamily="34" charset="-122"/>
                 <a:cs typeface="Montserrat" pitchFamily="34" charset="-120"/>
               </a:rPr>
-              <a:t>02 · PREFERRED LENDER</a:t>
+              <a:t>02 · CONTENT PARTNER</a:t>
             </a:r>
             <a:endParaRPr lang="en-US" sz="1300" dirty="0"/>
           </a:p>
@@ -6054,7 +6054,7 @@
                 <a:ea typeface="Montserrat" pitchFamily="34" charset="-122"/>
                 <a:cs typeface="Montserrat" pitchFamily="34" charset="-120"/>
               </a:rPr>
-              <a:t>Named inside the software</a:t>
+              <a:t>Built into the program</a:t>
             </a:r>
             <a:endParaRPr lang="en-US" sz="1650" dirty="0"/>
           </a:p>
@@ -6096,7 +6096,7 @@
                 <a:ea typeface="Arial" pitchFamily="34" charset="-122"/>
                 <a:cs typeface="Arial" pitchFamily="34" charset="-120"/>
               </a:rPr>
-              <a:t>Cliffco named as the recommended lender inside the College Funding Secrets software and the Creative College Funding program.</a:t>
+              <a:t>Co-create a financing resource inside the College Funding Secrets software and the Creative College Funding program.</a:t>
             </a:r>
             <a:endParaRPr lang="en-US" sz="1300" dirty="0"/>
           </a:p>
@@ -6157,7 +6157,7 @@
                 <a:ea typeface="Montserrat" pitchFamily="34" charset="-122"/>
                 <a:cs typeface="Montserrat" pitchFamily="34" charset="-120"/>
               </a:rPr>
-              <a:t>03 · AFFILIATE / REFERRAL</a:t>
+              <a:t>03 · CO-MARKETING</a:t>
             </a:r>
             <a:endParaRPr lang="en-US" sz="1300" dirty="0"/>
           </a:p>
@@ -6196,7 +6196,7 @@
                 <a:ea typeface="Montserrat" pitchFamily="34" charset="-122"/>
                 <a:cs typeface="Montserrat" pitchFamily="34" charset="-120"/>
               </a:rPr>
-              <a:t>Lowest-friction start</a:t>
+              <a:t>Low commitment to start</a:t>
             </a:r>
             <a:endParaRPr lang="en-US" sz="1650" dirty="0"/>
           </a:p>
@@ -6238,7 +6238,7 @@
                 <a:ea typeface="Arial" pitchFamily="34" charset="-122"/>
                 <a:cs typeface="Arial" pitchFamily="34" charset="-120"/>
               </a:rPr>
-              <a:t>A flat payout per closed loan referred from your families — no exclusivity, no upfront cost.</a:t>
+              <a:t>Cliffco shows up where your families already are — inside your webinar or software.</a:t>
             </a:r>
             <a:endParaRPr lang="en-US" sz="1300" dirty="0"/>
           </a:p>
@@ -6774,7 +6774,7 @@
                 <a:ea typeface="Arial" pitchFamily="34" charset="-122"/>
                 <a:cs typeface="Arial" pitchFamily="34" charset="-120"/>
               </a:rPr>
-              <a:t>Referral or sponsorship revenue with no added workload on your team</a:t>
+              <a:t>Partnership upside with no added workload on your team</a:t>
             </a:r>
             <a:endParaRPr lang="en-US" sz="1400" dirty="0"/>
           </a:p>

--- a/outreach/pitch-decks/cliffco-lance-morgan-partnership.pptx
+++ b/outreach/pitch-decks/cliffco-lance-morgan-partnership.pptx
@@ -1903,7 +1903,7 @@
                 <a:ea typeface="Arial" pitchFamily="34" charset="-122"/>
                 <a:cs typeface="Arial" pitchFamily="34" charset="-120"/>
               </a:rPr>
-              <a:t>Prepared for Lance Morgan, by Logan Reese Levy, Loan Officer at Cliffco Mortgage Bankers</a:t>
+              <a:t>Prepared for Lance Morgan, by Logan Levy and Mario Argenzio, Loan Officers at Cliffco Mortgage Bankers</a:t>
             </a:r>
             <a:endParaRPr lang="en-US" sz="1800" dirty="0"/>
           </a:p>
@@ -2576,23 +2576,23 @@
         <p:spPr>
           <a:xfrm>
             <a:off x="640080" y="3200400"/>
-            <a:ext cx="8229600" cy="411480"/>
-          </a:xfrm>
-          <a:prstGeom prst="rect">
-            <a:avLst/>
-          </a:prstGeom>
-          <a:noFill/>
-          <a:ln/>
-        </p:spPr>
-        <p:txBody>
-          <a:bodyPr wrap="square" lIns="0" tIns="0" rIns="0" bIns="0" rtlCol="0" anchor="ctr"/>
-          <a:lstStyle/>
-          <a:p>
-            <a:pPr indent="0" marL="0">
-              <a:buNone/>
-            </a:pPr>
-            <a:r>
-              <a:rPr lang="en-US" sz="2000" b="1" dirty="0">
+            <a:ext cx="4663440" cy="365760"/>
+          </a:xfrm>
+          <a:prstGeom prst="rect">
+            <a:avLst/>
+          </a:prstGeom>
+          <a:noFill/>
+          <a:ln/>
+        </p:spPr>
+        <p:txBody>
+          <a:bodyPr wrap="square" lIns="0" tIns="0" rIns="0" bIns="0" rtlCol="0" anchor="ctr"/>
+          <a:lstStyle/>
+          <a:p>
+            <a:pPr indent="0" marL="0">
+              <a:buNone/>
+            </a:pPr>
+            <a:r>
+              <a:rPr lang="en-US" sz="1900" b="1" dirty="0">
                 <a:solidFill>
                   <a:srgbClr val="FBFAF8"/>
                 </a:solidFill>
@@ -2600,9 +2600,9 @@
                 <a:ea typeface="Arial" pitchFamily="34" charset="-122"/>
                 <a:cs typeface="Arial" pitchFamily="34" charset="-120"/>
               </a:rPr>
-              <a:t>Logan Reese Levy</a:t>
-            </a:r>
-            <a:endParaRPr lang="en-US" sz="2000" dirty="0"/>
+              <a:t>Logan Levy</a:t>
+            </a:r>
+            <a:endParaRPr lang="en-US" sz="1900" dirty="0"/>
           </a:p>
         </p:txBody>
       </p:sp>
@@ -2614,24 +2614,24 @@
         </p:nvSpPr>
         <p:spPr>
           <a:xfrm>
-            <a:off x="640080" y="3584448"/>
-            <a:ext cx="8229600" cy="365760"/>
-          </a:xfrm>
-          <a:prstGeom prst="rect">
-            <a:avLst/>
-          </a:prstGeom>
-          <a:noFill/>
-          <a:ln/>
-        </p:spPr>
-        <p:txBody>
-          <a:bodyPr wrap="square" lIns="0" tIns="0" rIns="0" bIns="0" rtlCol="0" anchor="ctr"/>
-          <a:lstStyle/>
-          <a:p>
-            <a:pPr indent="0" marL="0">
-              <a:buNone/>
-            </a:pPr>
-            <a:r>
-              <a:rPr lang="en-US" sz="1500" dirty="0">
+            <a:off x="640080" y="3566160"/>
+            <a:ext cx="4663440" cy="365760"/>
+          </a:xfrm>
+          <a:prstGeom prst="rect">
+            <a:avLst/>
+          </a:prstGeom>
+          <a:noFill/>
+          <a:ln/>
+        </p:spPr>
+        <p:txBody>
+          <a:bodyPr wrap="square" lIns="0" tIns="0" rIns="0" bIns="0" rtlCol="0" anchor="ctr"/>
+          <a:lstStyle/>
+          <a:p>
+            <a:pPr indent="0" marL="0">
+              <a:buNone/>
+            </a:pPr>
+            <a:r>
+              <a:rPr lang="en-US" sz="1350" dirty="0">
                 <a:solidFill>
                   <a:srgbClr val="BDE8F1"/>
                 </a:solidFill>
@@ -2641,7 +2641,7 @@
               </a:rPr>
               <a:t>Loan Officer · Cliffco Mortgage Bankers · NMLS #2502088</a:t>
             </a:r>
-            <a:endParaRPr lang="en-US" sz="1500" dirty="0"/>
+            <a:endParaRPr lang="en-US" sz="1350" dirty="0"/>
           </a:p>
         </p:txBody>
       </p:sp>
@@ -2653,24 +2653,24 @@
         </p:nvSpPr>
         <p:spPr>
           <a:xfrm>
-            <a:off x="640080" y="3950208"/>
-            <a:ext cx="8229600" cy="365760"/>
-          </a:xfrm>
-          <a:prstGeom prst="rect">
-            <a:avLst/>
-          </a:prstGeom>
-          <a:noFill/>
-          <a:ln/>
-        </p:spPr>
-        <p:txBody>
-          <a:bodyPr wrap="square" lIns="0" tIns="0" rIns="0" bIns="0" rtlCol="0" anchor="ctr"/>
-          <a:lstStyle/>
-          <a:p>
-            <a:pPr indent="0" marL="0">
-              <a:buNone/>
-            </a:pPr>
-            <a:r>
-              <a:rPr lang="en-US" sz="1500" dirty="0">
+            <a:off x="640080" y="3913632"/>
+            <a:ext cx="4663440" cy="365760"/>
+          </a:xfrm>
+          <a:prstGeom prst="rect">
+            <a:avLst/>
+          </a:prstGeom>
+          <a:noFill/>
+          <a:ln/>
+        </p:spPr>
+        <p:txBody>
+          <a:bodyPr wrap="square" lIns="0" tIns="0" rIns="0" bIns="0" rtlCol="0" anchor="ctr"/>
+          <a:lstStyle/>
+          <a:p>
+            <a:pPr indent="0" marL="0">
+              <a:buNone/>
+            </a:pPr>
+            <a:r>
+              <a:rPr lang="en-US" sz="1350" dirty="0">
                 <a:solidFill>
                   <a:srgbClr val="D9D5E0"/>
                 </a:solidFill>
@@ -2680,7 +2680,7 @@
               </a:rPr>
               <a:t>[Logan's direct phone]  ·  [Logan's direct email]</a:t>
             </a:r>
-            <a:endParaRPr lang="en-US" sz="1500" dirty="0"/>
+            <a:endParaRPr lang="en-US" sz="1350" dirty="0"/>
           </a:p>
         </p:txBody>
       </p:sp>
@@ -2692,31 +2692,148 @@
         </p:nvSpPr>
         <p:spPr>
           <a:xfrm>
-            <a:off x="640080" y="4315968"/>
-            <a:ext cx="9601200" cy="365760"/>
-          </a:xfrm>
-          <a:prstGeom prst="rect">
-            <a:avLst/>
-          </a:prstGeom>
-          <a:noFill/>
-          <a:ln/>
-        </p:spPr>
-        <p:txBody>
-          <a:bodyPr wrap="square" lIns="0" tIns="0" rIns="0" bIns="0" rtlCol="0" anchor="ctr"/>
-          <a:lstStyle/>
-          <a:p>
-            <a:pPr indent="0" marL="0">
-              <a:buNone/>
-            </a:pPr>
-            <a:r>
-              <a:rPr lang="en-US" sz="1500" dirty="0">
-                <a:solidFill>
-                  <a:srgbClr val="D9D5E0"/>
+            <a:off x="5852160" y="3200400"/>
+            <a:ext cx="4663440" cy="365760"/>
+          </a:xfrm>
+          <a:prstGeom prst="rect">
+            <a:avLst/>
+          </a:prstGeom>
+          <a:noFill/>
+          <a:ln/>
+        </p:spPr>
+        <p:txBody>
+          <a:bodyPr wrap="square" lIns="0" tIns="0" rIns="0" bIns="0" rtlCol="0" anchor="ctr"/>
+          <a:lstStyle/>
+          <a:p>
+            <a:pPr indent="0" marL="0">
+              <a:buNone/>
+            </a:pPr>
+            <a:r>
+              <a:rPr lang="en-US" sz="1900" b="1" dirty="0">
+                <a:solidFill>
+                  <a:srgbClr val="FBFAF8"/>
                 </a:solidFill>
                 <a:latin typeface="Arial" pitchFamily="34" charset="0"/>
                 <a:ea typeface="Arial" pitchFamily="34" charset="-122"/>
                 <a:cs typeface="Arial" pitchFamily="34" charset="-120"/>
               </a:rPr>
+              <a:t>Mario Argenzio</a:t>
+            </a:r>
+            <a:endParaRPr lang="en-US" sz="1900" dirty="0"/>
+          </a:p>
+        </p:txBody>
+      </p:sp>
+      <p:sp>
+        <p:nvSpPr>
+          <p:cNvPr id="8" name="Text 5"/>
+          <p:cNvSpPr txBox="1"/>
+          <p:nvPr/>
+        </p:nvSpPr>
+        <p:spPr>
+          <a:xfrm>
+            <a:off x="5852160" y="3566160"/>
+            <a:ext cx="4663440" cy="365760"/>
+          </a:xfrm>
+          <a:prstGeom prst="rect">
+            <a:avLst/>
+          </a:prstGeom>
+          <a:noFill/>
+          <a:ln/>
+        </p:spPr>
+        <p:txBody>
+          <a:bodyPr wrap="square" lIns="0" tIns="0" rIns="0" bIns="0" rtlCol="0" anchor="ctr"/>
+          <a:lstStyle/>
+          <a:p>
+            <a:pPr indent="0" marL="0">
+              <a:buNone/>
+            </a:pPr>
+            <a:r>
+              <a:rPr lang="en-US" sz="1350" dirty="0">
+                <a:solidFill>
+                  <a:srgbClr val="BDE8F1"/>
+                </a:solidFill>
+                <a:latin typeface="Arial" pitchFamily="34" charset="0"/>
+                <a:ea typeface="Arial" pitchFamily="34" charset="-122"/>
+                <a:cs typeface="Arial" pitchFamily="34" charset="-120"/>
+              </a:rPr>
+              <a:t>Loan Officer · Cliffco Mortgage Bankers · NMLS #1869384</a:t>
+            </a:r>
+            <a:endParaRPr lang="en-US" sz="1350" dirty="0"/>
+          </a:p>
+        </p:txBody>
+      </p:sp>
+      <p:sp>
+        <p:nvSpPr>
+          <p:cNvPr id="9" name="Text 6"/>
+          <p:cNvSpPr txBox="1"/>
+          <p:nvPr/>
+        </p:nvSpPr>
+        <p:spPr>
+          <a:xfrm>
+            <a:off x="5852160" y="3913632"/>
+            <a:ext cx="4663440" cy="365760"/>
+          </a:xfrm>
+          <a:prstGeom prst="rect">
+            <a:avLst/>
+          </a:prstGeom>
+          <a:noFill/>
+          <a:ln/>
+        </p:spPr>
+        <p:txBody>
+          <a:bodyPr wrap="square" lIns="0" tIns="0" rIns="0" bIns="0" rtlCol="0" anchor="ctr"/>
+          <a:lstStyle/>
+          <a:p>
+            <a:pPr indent="0" marL="0">
+              <a:buNone/>
+            </a:pPr>
+            <a:r>
+              <a:rPr lang="en-US" sz="1350" dirty="0">
+                <a:solidFill>
+                  <a:srgbClr val="D9D5E0"/>
+                </a:solidFill>
+                <a:latin typeface="Arial" pitchFamily="34" charset="0"/>
+                <a:ea typeface="Arial" pitchFamily="34" charset="-122"/>
+                <a:cs typeface="Arial" pitchFamily="34" charset="-120"/>
+              </a:rPr>
+              <a:t>[Mario's direct phone]  ·  [Mario's direct email]</a:t>
+            </a:r>
+            <a:endParaRPr lang="en-US" sz="1350" dirty="0"/>
+          </a:p>
+        </p:txBody>
+      </p:sp>
+      <p:sp>
+        <p:nvSpPr>
+          <p:cNvPr id="10" name="Text 7"/>
+          <p:cNvSpPr txBox="1"/>
+          <p:nvPr/>
+        </p:nvSpPr>
+        <p:spPr>
+          <a:xfrm>
+            <a:off x="640080" y="4389120"/>
+            <a:ext cx="9601200" cy="365760"/>
+          </a:xfrm>
+          <a:prstGeom prst="rect">
+            <a:avLst/>
+          </a:prstGeom>
+          <a:noFill/>
+          <a:ln/>
+        </p:spPr>
+        <p:txBody>
+          <a:bodyPr wrap="square" lIns="0" tIns="0" rIns="0" bIns="0" rtlCol="0" anchor="ctr"/>
+          <a:lstStyle/>
+          <a:p>
+            <a:pPr indent="0" marL="0">
+              <a:buNone/>
+            </a:pPr>
+            <a:r>
+              <a:rPr lang="en-US" sz="1500" dirty="0">
+                <a:solidFill>
+                  <a:srgbClr val="D9D5E0"/>
+                </a:solidFill>
+                <a:latin typeface="Arial" pitchFamily="34" charset="0"/>
+                <a:ea typeface="Arial" pitchFamily="34" charset="-122"/>
+                <a:cs typeface="Arial" pitchFamily="34" charset="-120"/>
+              </a:rPr>
               <a:t>Cliffco HQ: (516) 408-7300 · 70 Charles Lindbergh Blvd, Suite 200, Uniondale, NY 11553</a:t>
             </a:r>
             <a:endParaRPr lang="en-US" sz="1500" dirty="0"/>
@@ -2725,14 +2842,14 @@
       </p:sp>
       <p:sp>
         <p:nvSpPr>
-          <p:cNvPr id="8" name="Text 5"/>
-          <p:cNvSpPr txBox="1"/>
-          <p:nvPr/>
-        </p:nvSpPr>
-        <p:spPr>
-          <a:xfrm>
-            <a:off x="640080" y="5897880"/>
-            <a:ext cx="9692640" cy="685800"/>
+          <p:cNvPr id="11" name="Text 8"/>
+          <p:cNvSpPr txBox="1"/>
+          <p:nvPr/>
+        </p:nvSpPr>
+        <p:spPr>
+          <a:xfrm>
+            <a:off x="640080" y="5852160"/>
+            <a:ext cx="9966960" cy="731520"/>
           </a:xfrm>
           <a:prstGeom prst="rect">
             <a:avLst/>
@@ -2751,7 +2868,7 @@
               <a:buNone/>
             </a:pPr>
             <a:r>
-              <a:rPr lang="en-US" sz="950" dirty="0">
+              <a:rPr lang="en-US" sz="850" dirty="0">
                 <a:solidFill>
                   <a:srgbClr val="8A8792"/>
                 </a:solidFill>
@@ -2759,15 +2876,15 @@
                 <a:ea typeface="Arial" pitchFamily="34" charset="-122"/>
                 <a:cs typeface="Arial" pitchFamily="34" charset="-120"/>
               </a:rPr>
-              <a:t>Cliffco, Inc. is not affiliated with or acting on behalf of the FHA or any government entity. Equal Housing Lender. Corporate NMLS #65328 (nmlsconsumeraccess.org). Logan Reese Levy, NMLS #2502088, licensed in AZ, CA, FL, MN, NC, NJ, NY, PA, SC, TN, VT. Not a commitment to lend; all loans subject to credit and underwriting approval.</a:t>
-            </a:r>
-            <a:endParaRPr lang="en-US" sz="950" dirty="0"/>
+              <a:t>Cliffco, Inc. is not affiliated with or acting on behalf of the FHA or any government entity. Equal Housing Lender. Corporate NMLS #65328 (nmlsconsumeraccess.org). Logan Levy, NMLS #2502088, licensed in AZ, CA, FL, MN, NC, NJ, NY, PA, SC, TN, VT. Mario Argenzio, NMLS #1869384, licensed in AZ, CA, CO, CT, FL, GA, IA, MN, NC, NJ, NY, OK, PA, SC, TN, VA. Not a commitment to lend; all loans subject to credit and underwriting approval.</a:t>
+            </a:r>
+            <a:endParaRPr lang="en-US" sz="850" dirty="0"/>
           </a:p>
         </p:txBody>
       </p:sp>
       <p:pic>
         <p:nvPicPr>
-          <p:cNvPr id="9" name="Image 1" descr="/home/user/STR/brand/logos/EHO_White.png">    </p:cNvPr>
+          <p:cNvPr id="12" name="Image 1" descr="/home/user/STR/brand/logos/EHO_White.png">    </p:cNvPr>
           <p:cNvPicPr>
             <a:picLocks noChangeAspect="1"/>
           </p:cNvPicPr>
@@ -5552,7 +5669,7 @@
                 <a:ea typeface="Montserrat" pitchFamily="34" charset="-122"/>
                 <a:cs typeface="Montserrat" pitchFamily="34" charset="-120"/>
               </a:rPr>
-              <a:t>Logan Reese Levy</a:t>
+              <a:t>Logan Levy &amp; Mario Argenzio</a:t>
             </a:r>
             <a:endParaRPr lang="en-US" sz="1800" dirty="0"/>
           </a:p>
@@ -5594,7 +5711,7 @@
                 <a:ea typeface="Arial" pitchFamily="34" charset="-122"/>
                 <a:cs typeface="Arial" pitchFamily="34" charset="-120"/>
               </a:rPr>
-              <a:t>NMLS #2502088, personally licensed in 11 states — AZ, CA, FL, MN, NC, NJ, NY, PA, SC, TN, and VT.</a:t>
+              <a:t>NMLS #2502088 (Logan) and #1869384 (Mario) — personally licensed across 17 states between them: AZ, CA, CO, CT, FL, GA, IA, MN, NC, NJ, NY, OK, PA, SC, TN, VA, and VT.</a:t>
             </a:r>
             <a:endParaRPr lang="en-US" sz="1400" dirty="0"/>
           </a:p>
@@ -5770,7 +5887,7 @@
                 <a:ea typeface="Montserrat" pitchFamily="34" charset="-122"/>
                 <a:cs typeface="Montserrat" pitchFamily="34" charset="-120"/>
               </a:rPr>
-              <a:t>THREE WAYS TO PARTNER</a:t>
+              <a:t>FOUR WAYS TO PARTNER</a:t>
             </a:r>
             <a:endParaRPr lang="en-US" sz="1400" dirty="0"/>
           </a:p>
@@ -5827,11 +5944,11 @@
         <p:spPr>
           <a:xfrm>
             <a:off x="640080" y="2011680"/>
-            <a:ext cx="3393338" cy="2834640"/>
+            <a:ext cx="2522144" cy="2834640"/>
           </a:xfrm>
           <a:prstGeom prst="roundRect">
             <a:avLst>
-              <a:gd name="adj" fmla="val 3871"/>
+              <a:gd name="adj" fmla="val 4351"/>
             </a:avLst>
           </a:prstGeom>
           <a:solidFill>
@@ -5848,24 +5965,24 @@
         </p:nvSpPr>
         <p:spPr>
           <a:xfrm>
-            <a:off x="914400" y="2267712"/>
-            <a:ext cx="2844698" cy="457200"/>
-          </a:xfrm>
-          <a:prstGeom prst="rect">
-            <a:avLst/>
-          </a:prstGeom>
-          <a:noFill/>
-          <a:ln/>
-        </p:spPr>
-        <p:txBody>
-          <a:bodyPr wrap="square" lIns="0" tIns="0" rIns="0" bIns="0" rtlCol="0" anchor="ctr"/>
-          <a:lstStyle/>
-          <a:p>
-            <a:pPr indent="0" marL="0">
-              <a:buNone/>
-            </a:pPr>
-            <a:r>
-              <a:rPr lang="en-US" sz="1300" b="1" spc="100" kern="0" dirty="0">
+            <a:off x="868680" y="2249424"/>
+            <a:ext cx="2064944" cy="457200"/>
+          </a:xfrm>
+          <a:prstGeom prst="rect">
+            <a:avLst/>
+          </a:prstGeom>
+          <a:noFill/>
+          <a:ln/>
+        </p:spPr>
+        <p:txBody>
+          <a:bodyPr wrap="square" lIns="0" tIns="0" rIns="0" bIns="0" rtlCol="0" anchor="ctr"/>
+          <a:lstStyle/>
+          <a:p>
+            <a:pPr indent="0" marL="0">
+              <a:buNone/>
+            </a:pPr>
+            <a:r>
+              <a:rPr lang="en-US" sz="1150" b="1" spc="50" kern="0" dirty="0">
                 <a:solidFill>
                   <a:srgbClr val="6633CC"/>
                 </a:solidFill>
@@ -5873,9 +5990,9 @@
                 <a:ea typeface="Montserrat" pitchFamily="34" charset="-122"/>
                 <a:cs typeface="Montserrat" pitchFamily="34" charset="-120"/>
               </a:rPr>
-              <a:t>01 · WEBINAR PARTNER</a:t>
-            </a:r>
-            <a:endParaRPr lang="en-US" sz="1300" dirty="0"/>
+              <a:t>01 · OFFICE HOURS</a:t>
+            </a:r>
+            <a:endParaRPr lang="en-US" sz="1150" dirty="0"/>
           </a:p>
         </p:txBody>
       </p:sp>
@@ -5887,24 +6004,27 @@
         </p:nvSpPr>
         <p:spPr>
           <a:xfrm>
-            <a:off x="914400" y="2761488"/>
-            <a:ext cx="2844698" cy="457200"/>
-          </a:xfrm>
-          <a:prstGeom prst="rect">
-            <a:avLst/>
-          </a:prstGeom>
-          <a:noFill/>
-          <a:ln/>
-        </p:spPr>
-        <p:txBody>
-          <a:bodyPr wrap="square" lIns="0" tIns="0" rIns="0" bIns="0" rtlCol="0" anchor="ctr"/>
-          <a:lstStyle/>
-          <a:p>
-            <a:pPr indent="0" marL="0">
-              <a:buNone/>
-            </a:pPr>
-            <a:r>
-              <a:rPr lang="en-US" sz="1650" b="1" dirty="0">
+            <a:off x="868680" y="2706624"/>
+            <a:ext cx="2064944" cy="594360"/>
+          </a:xfrm>
+          <a:prstGeom prst="rect">
+            <a:avLst/>
+          </a:prstGeom>
+          <a:noFill/>
+          <a:ln/>
+        </p:spPr>
+        <p:txBody>
+          <a:bodyPr wrap="square" lIns="0" tIns="0" rIns="0" bIns="0" rtlCol="0" anchor="ctr"/>
+          <a:lstStyle/>
+          <a:p>
+            <a:pPr indent="0" marL="0">
+              <a:lnSpc>
+                <a:spcPct val="110000"/>
+              </a:lnSpc>
+              <a:buNone/>
+            </a:pPr>
+            <a:r>
+              <a:rPr lang="en-US" sz="1500" b="1" dirty="0">
                 <a:solidFill>
                   <a:srgbClr val="0D0D0D"/>
                 </a:solidFill>
@@ -5912,9 +6032,9 @@
                 <a:ea typeface="Montserrat" pitchFamily="34" charset="-122"/>
                 <a:cs typeface="Montserrat" pitchFamily="34" charset="-120"/>
               </a:rPr>
-              <a:t>The other half of the strategy</a:t>
-            </a:r>
-            <a:endParaRPr lang="en-US" sz="1650" dirty="0"/>
+              <a:t>Already a proven rhythm</a:t>
+            </a:r>
+            <a:endParaRPr lang="en-US" sz="1500" dirty="0"/>
           </a:p>
         </p:txBody>
       </p:sp>
@@ -5926,8 +6046,8 @@
         </p:nvSpPr>
         <p:spPr>
           <a:xfrm>
-            <a:off x="914400" y="3291840"/>
-            <a:ext cx="2844698" cy="1325880"/>
+            <a:off x="868680" y="3346704"/>
+            <a:ext cx="2064944" cy="1280160"/>
           </a:xfrm>
           <a:prstGeom prst="rect">
             <a:avLst/>
@@ -5946,7 +6066,7 @@
               <a:buNone/>
             </a:pPr>
             <a:r>
-              <a:rPr lang="en-US" sz="1300" dirty="0">
+              <a:rPr lang="en-US" sz="1150" dirty="0">
                 <a:solidFill>
                   <a:srgbClr val="3D4040"/>
                 </a:solidFill>
@@ -5954,9 +6074,9 @@
                 <a:ea typeface="Arial" pitchFamily="34" charset="-122"/>
                 <a:cs typeface="Arial" pitchFamily="34" charset="-120"/>
               </a:rPr>
-              <a:t>Co-present the financing half of your free webinar — the strategy only works if they can close.</a:t>
-            </a:r>
-            <a:endParaRPr lang="en-US" sz="1300" dirty="0"/>
+              <a:t>Twice a week, a Cliffco loan officer sits in on live office hours with an educator partner's members, answering financing questions in real time — we'd bring that same cadence to your families.</a:t>
+            </a:r>
+            <a:endParaRPr lang="en-US" sz="1150" dirty="0"/>
           </a:p>
         </p:txBody>
       </p:sp>
@@ -5968,12 +6088,12 @@
         </p:nvSpPr>
         <p:spPr>
           <a:xfrm>
-            <a:off x="4399178" y="2011680"/>
-            <a:ext cx="3393338" cy="2834640"/>
+            <a:off x="3436544" y="2011680"/>
+            <a:ext cx="2522144" cy="2834640"/>
           </a:xfrm>
           <a:prstGeom prst="roundRect">
             <a:avLst>
-              <a:gd name="adj" fmla="val 3871"/>
+              <a:gd name="adj" fmla="val 4351"/>
             </a:avLst>
           </a:prstGeom>
           <a:solidFill>
@@ -5990,24 +6110,24 @@
         </p:nvSpPr>
         <p:spPr>
           <a:xfrm>
-            <a:off x="4673498" y="2267712"/>
-            <a:ext cx="2844698" cy="457200"/>
-          </a:xfrm>
-          <a:prstGeom prst="rect">
-            <a:avLst/>
-          </a:prstGeom>
-          <a:noFill/>
-          <a:ln/>
-        </p:spPr>
-        <p:txBody>
-          <a:bodyPr wrap="square" lIns="0" tIns="0" rIns="0" bIns="0" rtlCol="0" anchor="ctr"/>
-          <a:lstStyle/>
-          <a:p>
-            <a:pPr indent="0" marL="0">
-              <a:buNone/>
-            </a:pPr>
-            <a:r>
-              <a:rPr lang="en-US" sz="1300" b="1" spc="100" kern="0" dirty="0">
+            <a:off x="3665144" y="2249424"/>
+            <a:ext cx="2064944" cy="457200"/>
+          </a:xfrm>
+          <a:prstGeom prst="rect">
+            <a:avLst/>
+          </a:prstGeom>
+          <a:noFill/>
+          <a:ln/>
+        </p:spPr>
+        <p:txBody>
+          <a:bodyPr wrap="square" lIns="0" tIns="0" rIns="0" bIns="0" rtlCol="0" anchor="ctr"/>
+          <a:lstStyle/>
+          <a:p>
+            <a:pPr indent="0" marL="0">
+              <a:buNone/>
+            </a:pPr>
+            <a:r>
+              <a:rPr lang="en-US" sz="1150" b="1" spc="50" kern="0" dirty="0">
                 <a:solidFill>
                   <a:srgbClr val="6633CC"/>
                 </a:solidFill>
@@ -6015,9 +6135,9 @@
                 <a:ea typeface="Montserrat" pitchFamily="34" charset="-122"/>
                 <a:cs typeface="Montserrat" pitchFamily="34" charset="-120"/>
               </a:rPr>
-              <a:t>02 · CONTENT PARTNER</a:t>
-            </a:r>
-            <a:endParaRPr lang="en-US" sz="1300" dirty="0"/>
+              <a:t>02 · WEBINAR PARTNER</a:t>
+            </a:r>
+            <a:endParaRPr lang="en-US" sz="1150" dirty="0"/>
           </a:p>
         </p:txBody>
       </p:sp>
@@ -6029,24 +6149,27 @@
         </p:nvSpPr>
         <p:spPr>
           <a:xfrm>
-            <a:off x="4673498" y="2761488"/>
-            <a:ext cx="2844698" cy="457200"/>
-          </a:xfrm>
-          <a:prstGeom prst="rect">
-            <a:avLst/>
-          </a:prstGeom>
-          <a:noFill/>
-          <a:ln/>
-        </p:spPr>
-        <p:txBody>
-          <a:bodyPr wrap="square" lIns="0" tIns="0" rIns="0" bIns="0" rtlCol="0" anchor="ctr"/>
-          <a:lstStyle/>
-          <a:p>
-            <a:pPr indent="0" marL="0">
-              <a:buNone/>
-            </a:pPr>
-            <a:r>
-              <a:rPr lang="en-US" sz="1650" b="1" dirty="0">
+            <a:off x="3665144" y="2706624"/>
+            <a:ext cx="2064944" cy="594360"/>
+          </a:xfrm>
+          <a:prstGeom prst="rect">
+            <a:avLst/>
+          </a:prstGeom>
+          <a:noFill/>
+          <a:ln/>
+        </p:spPr>
+        <p:txBody>
+          <a:bodyPr wrap="square" lIns="0" tIns="0" rIns="0" bIns="0" rtlCol="0" anchor="ctr"/>
+          <a:lstStyle/>
+          <a:p>
+            <a:pPr indent="0" marL="0">
+              <a:lnSpc>
+                <a:spcPct val="110000"/>
+              </a:lnSpc>
+              <a:buNone/>
+            </a:pPr>
+            <a:r>
+              <a:rPr lang="en-US" sz="1500" b="1" dirty="0">
                 <a:solidFill>
                   <a:srgbClr val="0D0D0D"/>
                 </a:solidFill>
@@ -6054,9 +6177,9 @@
                 <a:ea typeface="Montserrat" pitchFamily="34" charset="-122"/>
                 <a:cs typeface="Montserrat" pitchFamily="34" charset="-120"/>
               </a:rPr>
-              <a:t>Built into the program</a:t>
-            </a:r>
-            <a:endParaRPr lang="en-US" sz="1650" dirty="0"/>
+              <a:t>The other half of the strategy</a:t>
+            </a:r>
+            <a:endParaRPr lang="en-US" sz="1500" dirty="0"/>
           </a:p>
         </p:txBody>
       </p:sp>
@@ -6068,8 +6191,8 @@
         </p:nvSpPr>
         <p:spPr>
           <a:xfrm>
-            <a:off x="4673498" y="3291840"/>
-            <a:ext cx="2844698" cy="1325880"/>
+            <a:off x="3665144" y="3346704"/>
+            <a:ext cx="2064944" cy="1280160"/>
           </a:xfrm>
           <a:prstGeom prst="rect">
             <a:avLst/>
@@ -6088,7 +6211,7 @@
               <a:buNone/>
             </a:pPr>
             <a:r>
-              <a:rPr lang="en-US" sz="1300" dirty="0">
+              <a:rPr lang="en-US" sz="1150" dirty="0">
                 <a:solidFill>
                   <a:srgbClr val="3D4040"/>
                 </a:solidFill>
@@ -6096,9 +6219,9 @@
                 <a:ea typeface="Arial" pitchFamily="34" charset="-122"/>
                 <a:cs typeface="Arial" pitchFamily="34" charset="-120"/>
               </a:rPr>
-              <a:t>Co-create a financing resource inside the College Funding Secrets software and the Creative College Funding program.</a:t>
-            </a:r>
-            <a:endParaRPr lang="en-US" sz="1300" dirty="0"/>
+              <a:t>Co-present the financing half of your free webinar — the strategy only works if they can close.</a:t>
+            </a:r>
+            <a:endParaRPr lang="en-US" sz="1150" dirty="0"/>
           </a:p>
         </p:txBody>
       </p:sp>
@@ -6110,12 +6233,12 @@
         </p:nvSpPr>
         <p:spPr>
           <a:xfrm>
-            <a:off x="8158277" y="2011680"/>
-            <a:ext cx="3393338" cy="2834640"/>
+            <a:off x="6233008" y="2011680"/>
+            <a:ext cx="2522144" cy="2834640"/>
           </a:xfrm>
           <a:prstGeom prst="roundRect">
             <a:avLst>
-              <a:gd name="adj" fmla="val 3871"/>
+              <a:gd name="adj" fmla="val 4351"/>
             </a:avLst>
           </a:prstGeom>
           <a:solidFill>
@@ -6132,24 +6255,24 @@
         </p:nvSpPr>
         <p:spPr>
           <a:xfrm>
-            <a:off x="8432597" y="2267712"/>
-            <a:ext cx="2844698" cy="457200"/>
-          </a:xfrm>
-          <a:prstGeom prst="rect">
-            <a:avLst/>
-          </a:prstGeom>
-          <a:noFill/>
-          <a:ln/>
-        </p:spPr>
-        <p:txBody>
-          <a:bodyPr wrap="square" lIns="0" tIns="0" rIns="0" bIns="0" rtlCol="0" anchor="ctr"/>
-          <a:lstStyle/>
-          <a:p>
-            <a:pPr indent="0" marL="0">
-              <a:buNone/>
-            </a:pPr>
-            <a:r>
-              <a:rPr lang="en-US" sz="1300" b="1" spc="100" kern="0" dirty="0">
+            <a:off x="6461608" y="2249424"/>
+            <a:ext cx="2064944" cy="457200"/>
+          </a:xfrm>
+          <a:prstGeom prst="rect">
+            <a:avLst/>
+          </a:prstGeom>
+          <a:noFill/>
+          <a:ln/>
+        </p:spPr>
+        <p:txBody>
+          <a:bodyPr wrap="square" lIns="0" tIns="0" rIns="0" bIns="0" rtlCol="0" anchor="ctr"/>
+          <a:lstStyle/>
+          <a:p>
+            <a:pPr indent="0" marL="0">
+              <a:buNone/>
+            </a:pPr>
+            <a:r>
+              <a:rPr lang="en-US" sz="1150" b="1" spc="50" kern="0" dirty="0">
                 <a:solidFill>
                   <a:srgbClr val="6633CC"/>
                 </a:solidFill>
@@ -6157,9 +6280,9 @@
                 <a:ea typeface="Montserrat" pitchFamily="34" charset="-122"/>
                 <a:cs typeface="Montserrat" pitchFamily="34" charset="-120"/>
               </a:rPr>
-              <a:t>03 · CO-MARKETING</a:t>
-            </a:r>
-            <a:endParaRPr lang="en-US" sz="1300" dirty="0"/>
+              <a:t>03 · CONTENT PARTNER</a:t>
+            </a:r>
+            <a:endParaRPr lang="en-US" sz="1150" dirty="0"/>
           </a:p>
         </p:txBody>
       </p:sp>
@@ -6171,24 +6294,27 @@
         </p:nvSpPr>
         <p:spPr>
           <a:xfrm>
-            <a:off x="8432597" y="2761488"/>
-            <a:ext cx="2844698" cy="457200"/>
-          </a:xfrm>
-          <a:prstGeom prst="rect">
-            <a:avLst/>
-          </a:prstGeom>
-          <a:noFill/>
-          <a:ln/>
-        </p:spPr>
-        <p:txBody>
-          <a:bodyPr wrap="square" lIns="0" tIns="0" rIns="0" bIns="0" rtlCol="0" anchor="ctr"/>
-          <a:lstStyle/>
-          <a:p>
-            <a:pPr indent="0" marL="0">
-              <a:buNone/>
-            </a:pPr>
-            <a:r>
-              <a:rPr lang="en-US" sz="1650" b="1" dirty="0">
+            <a:off x="6461608" y="2706624"/>
+            <a:ext cx="2064944" cy="594360"/>
+          </a:xfrm>
+          <a:prstGeom prst="rect">
+            <a:avLst/>
+          </a:prstGeom>
+          <a:noFill/>
+          <a:ln/>
+        </p:spPr>
+        <p:txBody>
+          <a:bodyPr wrap="square" lIns="0" tIns="0" rIns="0" bIns="0" rtlCol="0" anchor="ctr"/>
+          <a:lstStyle/>
+          <a:p>
+            <a:pPr indent="0" marL="0">
+              <a:lnSpc>
+                <a:spcPct val="110000"/>
+              </a:lnSpc>
+              <a:buNone/>
+            </a:pPr>
+            <a:r>
+              <a:rPr lang="en-US" sz="1500" b="1" dirty="0">
                 <a:solidFill>
                   <a:srgbClr val="0D0D0D"/>
                 </a:solidFill>
@@ -6196,9 +6322,9 @@
                 <a:ea typeface="Montserrat" pitchFamily="34" charset="-122"/>
                 <a:cs typeface="Montserrat" pitchFamily="34" charset="-120"/>
               </a:rPr>
-              <a:t>Low commitment to start</a:t>
-            </a:r>
-            <a:endParaRPr lang="en-US" sz="1650" dirty="0"/>
+              <a:t>Built into the program</a:t>
+            </a:r>
+            <a:endParaRPr lang="en-US" sz="1500" dirty="0"/>
           </a:p>
         </p:txBody>
       </p:sp>
@@ -6210,8 +6336,8 @@
         </p:nvSpPr>
         <p:spPr>
           <a:xfrm>
-            <a:off x="8432597" y="3291840"/>
-            <a:ext cx="2844698" cy="1325880"/>
+            <a:off x="6461608" y="3346704"/>
+            <a:ext cx="2064944" cy="1280160"/>
           </a:xfrm>
           <a:prstGeom prst="rect">
             <a:avLst/>
@@ -6230,7 +6356,7 @@
               <a:buNone/>
             </a:pPr>
             <a:r>
-              <a:rPr lang="en-US" sz="1300" dirty="0">
+              <a:rPr lang="en-US" sz="1150" dirty="0">
                 <a:solidFill>
                   <a:srgbClr val="3D4040"/>
                 </a:solidFill>
@@ -6238,45 +6364,190 @@
                 <a:ea typeface="Arial" pitchFamily="34" charset="-122"/>
                 <a:cs typeface="Arial" pitchFamily="34" charset="-120"/>
               </a:rPr>
-              <a:t>Cliffco shows up where your families already are — inside your webinar or software.</a:t>
-            </a:r>
-            <a:endParaRPr lang="en-US" sz="1300" dirty="0"/>
-          </a:p>
-        </p:txBody>
-      </p:sp>
-      <p:sp>
-        <p:nvSpPr>
-          <p:cNvPr id="16" name="Text 14"/>
-          <p:cNvSpPr txBox="1"/>
-          <p:nvPr/>
-        </p:nvSpPr>
-        <p:spPr>
-          <a:xfrm>
-            <a:off x="640080" y="6355080"/>
-            <a:ext cx="7315200" cy="320040"/>
-          </a:xfrm>
-          <a:prstGeom prst="rect">
-            <a:avLst/>
-          </a:prstGeom>
-          <a:noFill/>
-          <a:ln/>
-        </p:spPr>
-        <p:txBody>
-          <a:bodyPr wrap="square" lIns="0" tIns="0" rIns="0" bIns="0" rtlCol="0" anchor="ctr"/>
-          <a:lstStyle/>
-          <a:p>
-            <a:pPr indent="0" marL="0">
-              <a:buNone/>
-            </a:pPr>
-            <a:r>
-              <a:rPr lang="en-US" sz="1100" dirty="0">
-                <a:solidFill>
-                  <a:srgbClr val="5A5D5D"/>
+              <a:t>Co-create a financing resource inside the College Funding Secrets software and the Creative College Funding program.</a:t>
+            </a:r>
+            <a:endParaRPr lang="en-US" sz="1150" dirty="0"/>
+          </a:p>
+        </p:txBody>
+      </p:sp>
+      <p:sp>
+        <p:nvSpPr>
+          <p:cNvPr id="16" name="Shape 14"/>
+          <p:cNvSpPr/>
+          <p:nvPr/>
+        </p:nvSpPr>
+        <p:spPr>
+          <a:xfrm>
+            <a:off x="9029471" y="2011680"/>
+            <a:ext cx="2522144" cy="2834640"/>
+          </a:xfrm>
+          <a:prstGeom prst="roundRect">
+            <a:avLst>
+              <a:gd name="adj" fmla="val 4351"/>
+            </a:avLst>
+          </a:prstGeom>
+          <a:solidFill>
+            <a:srgbClr val="F0EEF1"/>
+          </a:solidFill>
+          <a:ln/>
+        </p:spPr>
+      </p:sp>
+      <p:sp>
+        <p:nvSpPr>
+          <p:cNvPr id="17" name="Text 15"/>
+          <p:cNvSpPr txBox="1"/>
+          <p:nvPr/>
+        </p:nvSpPr>
+        <p:spPr>
+          <a:xfrm>
+            <a:off x="9258071" y="2249424"/>
+            <a:ext cx="2064944" cy="457200"/>
+          </a:xfrm>
+          <a:prstGeom prst="rect">
+            <a:avLst/>
+          </a:prstGeom>
+          <a:noFill/>
+          <a:ln/>
+        </p:spPr>
+        <p:txBody>
+          <a:bodyPr wrap="square" lIns="0" tIns="0" rIns="0" bIns="0" rtlCol="0" anchor="ctr"/>
+          <a:lstStyle/>
+          <a:p>
+            <a:pPr indent="0" marL="0">
+              <a:buNone/>
+            </a:pPr>
+            <a:r>
+              <a:rPr lang="en-US" sz="1150" b="1" spc="50" kern="0" dirty="0">
+                <a:solidFill>
+                  <a:srgbClr val="6633CC"/>
+                </a:solidFill>
+                <a:latin typeface="Montserrat" pitchFamily="34" charset="0"/>
+                <a:ea typeface="Montserrat" pitchFamily="34" charset="-122"/>
+                <a:cs typeface="Montserrat" pitchFamily="34" charset="-120"/>
+              </a:rPr>
+              <a:t>04 · CO-MARKETING</a:t>
+            </a:r>
+            <a:endParaRPr lang="en-US" sz="1150" dirty="0"/>
+          </a:p>
+        </p:txBody>
+      </p:sp>
+      <p:sp>
+        <p:nvSpPr>
+          <p:cNvPr id="18" name="Text 16"/>
+          <p:cNvSpPr txBox="1"/>
+          <p:nvPr/>
+        </p:nvSpPr>
+        <p:spPr>
+          <a:xfrm>
+            <a:off x="9258071" y="2706624"/>
+            <a:ext cx="2064944" cy="594360"/>
+          </a:xfrm>
+          <a:prstGeom prst="rect">
+            <a:avLst/>
+          </a:prstGeom>
+          <a:noFill/>
+          <a:ln/>
+        </p:spPr>
+        <p:txBody>
+          <a:bodyPr wrap="square" lIns="0" tIns="0" rIns="0" bIns="0" rtlCol="0" anchor="ctr"/>
+          <a:lstStyle/>
+          <a:p>
+            <a:pPr indent="0" marL="0">
+              <a:lnSpc>
+                <a:spcPct val="110000"/>
+              </a:lnSpc>
+              <a:buNone/>
+            </a:pPr>
+            <a:r>
+              <a:rPr lang="en-US" sz="1500" b="1" dirty="0">
+                <a:solidFill>
+                  <a:srgbClr val="0D0D0D"/>
+                </a:solidFill>
+                <a:latin typeface="Montserrat" pitchFamily="34" charset="0"/>
+                <a:ea typeface="Montserrat" pitchFamily="34" charset="-122"/>
+                <a:cs typeface="Montserrat" pitchFamily="34" charset="-120"/>
+              </a:rPr>
+              <a:t>Low commitment to start</a:t>
+            </a:r>
+            <a:endParaRPr lang="en-US" sz="1500" dirty="0"/>
+          </a:p>
+        </p:txBody>
+      </p:sp>
+      <p:sp>
+        <p:nvSpPr>
+          <p:cNvPr id="19" name="Text 17"/>
+          <p:cNvSpPr txBox="1"/>
+          <p:nvPr/>
+        </p:nvSpPr>
+        <p:spPr>
+          <a:xfrm>
+            <a:off x="9258071" y="3346704"/>
+            <a:ext cx="2064944" cy="1280160"/>
+          </a:xfrm>
+          <a:prstGeom prst="rect">
+            <a:avLst/>
+          </a:prstGeom>
+          <a:noFill/>
+          <a:ln/>
+        </p:spPr>
+        <p:txBody>
+          <a:bodyPr wrap="square" lIns="0" tIns="0" rIns="0" bIns="0" rtlCol="0" anchor="ctr"/>
+          <a:lstStyle/>
+          <a:p>
+            <a:pPr indent="0" marL="0">
+              <a:lnSpc>
+                <a:spcPct val="130000"/>
+              </a:lnSpc>
+              <a:buNone/>
+            </a:pPr>
+            <a:r>
+              <a:rPr lang="en-US" sz="1150" dirty="0">
+                <a:solidFill>
+                  <a:srgbClr val="3D4040"/>
                 </a:solidFill>
                 <a:latin typeface="Arial" pitchFamily="34" charset="0"/>
                 <a:ea typeface="Arial" pitchFamily="34" charset="-122"/>
                 <a:cs typeface="Arial" pitchFamily="34" charset="-120"/>
               </a:rPr>
+              <a:t>Cliffco shows up where your families already are — inside your webinar or software.</a:t>
+            </a:r>
+            <a:endParaRPr lang="en-US" sz="1150" dirty="0"/>
+          </a:p>
+        </p:txBody>
+      </p:sp>
+      <p:sp>
+        <p:nvSpPr>
+          <p:cNvPr id="20" name="Text 18"/>
+          <p:cNvSpPr txBox="1"/>
+          <p:nvPr/>
+        </p:nvSpPr>
+        <p:spPr>
+          <a:xfrm>
+            <a:off x="640080" y="6355080"/>
+            <a:ext cx="7315200" cy="320040"/>
+          </a:xfrm>
+          <a:prstGeom prst="rect">
+            <a:avLst/>
+          </a:prstGeom>
+          <a:noFill/>
+          <a:ln/>
+        </p:spPr>
+        <p:txBody>
+          <a:bodyPr wrap="square" lIns="0" tIns="0" rIns="0" bIns="0" rtlCol="0" anchor="ctr"/>
+          <a:lstStyle/>
+          <a:p>
+            <a:pPr indent="0" marL="0">
+              <a:buNone/>
+            </a:pPr>
+            <a:r>
+              <a:rPr lang="en-US" sz="1100" dirty="0">
+                <a:solidFill>
+                  <a:srgbClr val="5A5D5D"/>
+                </a:solidFill>
+                <a:latin typeface="Arial" pitchFamily="34" charset="0"/>
+                <a:ea typeface="Arial" pitchFamily="34" charset="-122"/>
+                <a:cs typeface="Arial" pitchFamily="34" charset="-120"/>
+              </a:rPr>
               <a:t>Cliffco Mortgage Bankers × College Funding Secrets</a:t>
             </a:r>
             <a:endParaRPr lang="en-US" sz="1100" dirty="0"/>
@@ -6285,7 +6556,7 @@
       </p:sp>
       <p:pic>
         <p:nvPicPr>
-          <p:cNvPr id="17" name="Image 0" descr="/home/user/STR/brand/logos/icon/Icon Black.png">    </p:cNvPr>
+          <p:cNvPr id="21" name="Image 0" descr="/home/user/STR/brand/logos/icon/Icon Black.png">    </p:cNvPr>
           <p:cNvPicPr>
             <a:picLocks noChangeAspect="1"/>
           </p:cNvPicPr>
